--- a/thesis-deck-system/artifacts/phase1/master_revised_render_compat.pptx
+++ b/thesis-deck-system/artifacts/phase1/master_revised_render_compat.pptx
@@ -510,12 +510,17 @@
           </a:p>
           <a:p>
             <a:r>
-              <a:t>Synthetic fixture: E001</a:t>
+              <a:t>E002</a:t>
             </a:r>
           </a:p>
           <a:p>
             <a:r>
               <a:t>[/Sources]</a:t>
+            </a:r>
+          </a:p>
+          <a:p>
+            <a:r>
+              <a:t>Synthetic fixture — verify evidence provenance.</a:t>
             </a:r>
           </a:p>
         </p:txBody>
@@ -590,12 +595,22 @@
           </a:p>
           <a:p>
             <a:r>
-              <a:t>Synthetic fixture: E001</a:t>
+              <a:t>E001</a:t>
+            </a:r>
+          </a:p>
+          <a:p>
+            <a:r>
+              <a:t>E003</a:t>
             </a:r>
           </a:p>
           <a:p>
             <a:r>
               <a:t>[/Sources]</a:t>
+            </a:r>
+          </a:p>
+          <a:p>
+            <a:r>
+              <a:t>Synthetic fixture — verify evidence provenance.</a:t>
             </a:r>
           </a:p>
         </p:txBody>
@@ -3911,13 +3926,13 @@
           <a:p>
             <a:r>
               <a:rPr sz="1600"/>
-              <a:t>Decision: Trend supports the mechanism but a control is missing.</a:t>
+              <a:t>Decision: Reproducible trend remains non-discriminating.</a:t>
             </a:r>
           </a:p>
           <a:p>
             <a:r>
               <a:rPr sz="1600"/>
-              <a:t>Next Step: Run synthetic position comparison; due 2026-09-10T09:00:00Z</a:t>
+              <a:t>Next Step: Run synthetic position comparison; status in_progress; due 2026-09-10T09:00:00Z</a:t>
             </a:r>
           </a:p>
         </p:txBody>

--- a/thesis-deck-system/artifacts/phase1/master_revised_render_compat.pptx
+++ b/thesis-deck-system/artifacts/phase1/master_revised_render_compat.pptx
@@ -3932,7 +3932,7 @@
           <a:p>
             <a:r>
               <a:rPr sz="1600"/>
-              <a:t>Next Step: Run synthetic position comparison; status in_progress; due 2026-09-10T09:00:00Z</a:t>
+              <a:t>Next Step: Run matched-position tracer control; status in_progress; due 2026-09-10T09:00:00Z</a:t>
             </a:r>
           </a:p>
         </p:txBody>
